--- a/Science_Teesside/Teaching_Packs/GROW/lessons/W3B/GROW_Science_Autumn1_W3B_Friction_Test.pptx
+++ b/Science_Teesside/Teaching_Packs/GROW/lessons/W3B/GROW_Science_Autumn1_W3B_Friction_Test.pptx
@@ -461,14 +461,10 @@
           </a:p>
           <a:p xmlns:a="http://schemas.openxmlformats.org/drawingml/2006/main">
             <a:r>
-              <a:t>Reference screen only: no extra starter time. Tuesday begins with the source's 32-minute Independent Work workshop. Retain Monday's prediction; use slide 2 immediately.</a:t>
-            </a:r>
-          </a:p>
-          <a:p xmlns:a="http://schemas.openxmlformats.org/drawingml/2006/main">
-            <a:r>
-              <a:t/>
-            </a:r>
-          </a:p>
+              <a:t>Reference screen only: no extra starter time. Lesson B begins with the source’s 32-minute Independent Work workshop. Retain the Lesson A prediction; use slide 2 immediately. Lesson B stays 32 + 4 + 4 minutes: workshop, Review the evidence, Exit Ticket.</a:t>
+            </a:r>
+          </a:p>
+          <a:p xmlns:a="http://schemas.openxmlformats.org/drawingml/2006/main"/>
           <a:p xmlns:a="http://schemas.openxmlformats.org/drawingml/2006/main">
             <a:r>
               <a:t>[Sources]</a:t>
@@ -494,12 +490,20 @@
               <a:t>[/Sources]</a:t>
             </a:r>
           </a:p>
-          <a:p xmlns:a="http://schemas.openxmlformats.org/drawingml/2006/main">
-            <a:r>
-              <a:t>
-[Sources]
-Generated contextual illustration for this visual edition; not measured or recorded experimental evidence.
-[/Sources]</a:t>
+          <a:p xmlns:a="http://schemas.openxmlformats.org/drawingml/2006/main"/>
+          <a:p xmlns:a="http://schemas.openxmlformats.org/drawingml/2006/main">
+            <a:r>
+              <a:t>[Sources]</a:t>
+            </a:r>
+          </a:p>
+          <a:p xmlns:a="http://schemas.openxmlformats.org/drawingml/2006/main">
+            <a:r>
+              <a:t>Generated contextual illustration for this visual edition; not measured or recorded experimental evidence.</a:t>
+            </a:r>
+          </a:p>
+          <a:p xmlns:a="http://schemas.openxmlformats.org/drawingml/2006/main">
+            <a:r>
+              <a:t>[/Sources]</a:t>
             </a:r>
           </a:p>
         </p:txBody>
@@ -884,19 +888,35 @@
           <a:lstStyle xmlns:a="http://schemas.openxmlformats.org/drawingml/2006/main"/>
           <a:p xmlns:a="http://schemas.openxmlformats.org/drawingml/2006/main">
             <a:r>
-              <a:t>Lundy Loop — pupil feedback — 4 minutes within the source's 40-minute lesson.</a:t>
-            </a:r>
-          </a:p>
-          <a:p xmlns:a="http://schemas.openxmlformats.org/drawingml/2006/main">
-            <a:r>
-              <a:t>Exact four-minute source feedback stage. Ramps can clatter; recorder/director role remains science. Adult listens, names what can change now, acts where possible and checks whether it helped. Examples: quieter landing tray, clearer release signal, wider table. No display, photography or sharing assumed.</a:t>
-            </a:r>
-          </a:p>
-          <a:p xmlns:a="http://schemas.openxmlformats.org/drawingml/2006/main">
-            <a:r>
-              <a:t/>
-            </a:r>
-          </a:p>
+              <a:t>Review the evidence — 4 minutes within the source’s 40-minute lesson. Exact four-minute stage between the 32-minute workshop and the 4-minute exit; no separate feedback form or standalone participation stage.</a:t>
+            </a:r>
+          </a:p>
+          <a:p xmlns:a="http://schemas.openxmlformats.org/drawingml/2006/main">
+            <a:r>
+              <a:t>Revisit one conclusion against the existing results or clearly labelled model data. Hear, read or watch the pupil response; adapt the explanation or scaffold and explain any limit. Preserve original values and label retries. Passing is allowed. No automatic R.</a:t>
+            </a:r>
+          </a:p>
+          <a:p xmlns:a="http://schemas.openxmlformats.org/drawingml/2006/main">
+            <a:r>
+              <a:t>Lesson B: review the evidence — After the 32-minute workshop, use four minutes to revisit one conclusion and its supporting results with the adult, then four minutes for the exit. Use the existing record or an equivalent response; do not require a separate loop sheet. Explain any limit on a requested change and check whether the response helped.</a:t>
+            </a:r>
+          </a:p>
+          <a:p xmlns:a="http://schemas.openxmlformats.org/drawingml/2006/main">
+            <a:r>
+              <a:t>Listen and act — Space makes participation possible; Voice is the pupil's response in their own modality; Audience requires the adult to engage with it; Influence is the resulting adjustment to explanation, task, scaffold or subsequent teaching. One optional displayed prompt does not limit genuine feedback exchanges.</a:t>
+            </a:r>
+          </a:p>
+          <a:p xmlns:a="http://schemas.openxmlformats.org/drawingml/2006/main">
+            <a:r>
+              <a:t>Use marking codes honestly — Use R only after a pupil response and genuine adult engagement. A click, download, opened explanation or completed exit does not automatically establish Audience, Influence, R or an assessment outcome. Record only the evidence and help actually provided; do not require a duplicate written record for every task. Use agreed policy codes appropriately. Extended writing or assessment may need one or two precise next steps and response time.</a:t>
+            </a:r>
+          </a:p>
+          <a:p xmlns:a="http://schemas.openxmlformats.org/drawingml/2006/main">
+            <a:r>
+              <a:t>Policy and timing — Feedback &amp; Marking Policy 2025/2026 (Pilot), Issue 1, May 2026; master order §25.3. Lesson A remains 40 minutes. Lesson B remains 32 + 4 + 4 minutes. No extra pupil form, signature, standalone participation stage or progression gate is required.</a:t>
+            </a:r>
+          </a:p>
+          <a:p xmlns:a="http://schemas.openxmlformats.org/drawingml/2006/main"/>
           <a:p xmlns:a="http://schemas.openxmlformats.org/drawingml/2006/main">
             <a:r>
               <a:t>[Sources]</a:t>
@@ -909,12 +929,7 @@
           </a:p>
           <a:p xmlns:a="http://schemas.openxmlformats.org/drawingml/2006/main">
             <a:r>
-              <a:t>Git blob: 170d772a5e9d23909e95a534c5c1e16ee7df67c8.</a:t>
-            </a:r>
-          </a:p>
-          <a:p xmlns:a="http://schemas.openxmlformats.org/drawingml/2006/main">
-            <a:r>
-              <a:t>SHA256: 56c1655062d8f483a390cb7671603b576c992bca156ea4cdc586d6bcf908a2d5.</a:t>
+              <a:t>Historical conversion source Git blob: 170d772a5e9d23909e95a534c5c1e16ee7df67c8. Revision 15 September 2026: the four-minute review stage matches the canonical lesson’s Review the evidence and optional help prompt; no separate feedback form or standalone participation stage.</a:t>
             </a:r>
           </a:p>
           <a:p xmlns:a="http://schemas.openxmlformats.org/drawingml/2006/main">
@@ -1099,14 +1114,10 @@
           </a:p>
           <a:p xmlns:a="http://schemas.openxmlformats.org/drawingml/2006/main">
             <a:r>
-              <a:t>Reveal after response, final exit minute. Accept equivalent scientifically sound answers. Record whether pupil named a surface pair, helpful/unhelpful effect and evidence from the comparison. Clarify that friction opposes relative sliding or attempted sliding at a contact; static grip can help a person walk forwards.</a:t>
-            </a:r>
-          </a:p>
-          <a:p xmlns:a="http://schemas.openxmlformats.org/drawingml/2006/main">
-            <a:r>
-              <a:t/>
-            </a:r>
-          </a:p>
+              <a:t>Reveal after response, final exit minute. Accept equivalent scientifically sound answers. Record whether pupil named a surface pair, helpful/unhelpful effect and evidence from the comparison. Clarify that friction opposes relative sliding or attempted sliding at a contact; static grip can help a person walk forwards. Next lesson: Levers, pulleys and gears.</a:t>
+            </a:r>
+          </a:p>
+          <a:p xmlns:a="http://schemas.openxmlformats.org/drawingml/2006/main"/>
           <a:p xmlns:a="http://schemas.openxmlformats.org/drawingml/2006/main">
             <a:r>
               <a:t>[Sources]</a:t>
@@ -2613,6 +2624,10 @@
             <a:prstDash val="solid"/>
           </a:ln>
         </p:spPr>
+        <p:txBody xmlns:a="http://schemas.openxmlformats.org/drawingml/2006/main">
+          <a:bodyPr/>
+          <a:p/>
+        </p:txBody>
       </p:sp>
       <p:sp>
         <p:nvSpPr>
@@ -2762,6 +2777,10 @@
             <a:prstDash val="solid"/>
           </a:ln>
         </p:spPr>
+        <p:txBody xmlns:a="http://schemas.openxmlformats.org/drawingml/2006/main">
+          <a:bodyPr/>
+          <a:p/>
+        </p:txBody>
       </p:sp>
       <p:sp>
         <p:nvSpPr>
@@ -3083,6 +3102,10 @@
             <a:prstDash val="solid"/>
           </a:ln>
         </p:spPr>
+        <p:txBody xmlns:a="http://schemas.openxmlformats.org/drawingml/2006/main">
+          <a:bodyPr/>
+          <a:p/>
+        </p:txBody>
       </p:sp>
       <p:sp>
         <p:nvSpPr>
@@ -3232,6 +3255,10 @@
             <a:prstDash val="solid"/>
           </a:ln>
         </p:spPr>
+        <p:txBody xmlns:a="http://schemas.openxmlformats.org/drawingml/2006/main">
+          <a:bodyPr/>
+          <a:p/>
+        </p:txBody>
       </p:sp>
       <p:sp>
         <p:nvSpPr>
@@ -3673,6 +3700,10 @@
             </a:solidFill>
           </a:ln>
         </p:spPr>
+        <p:txBody xmlns:a="http://schemas.openxmlformats.org/drawingml/2006/main">
+          <a:bodyPr/>
+          <a:p/>
+        </p:txBody>
       </p:sp>
       <p:sp>
         <p:nvSpPr>
@@ -3760,6 +3791,10 @@
             </a:solidFill>
           </a:ln>
         </p:spPr>
+        <p:txBody xmlns:a="http://schemas.openxmlformats.org/drawingml/2006/main">
+          <a:bodyPr/>
+          <a:p/>
+        </p:txBody>
       </p:sp>
       <p:sp>
         <p:nvSpPr>
@@ -3847,6 +3882,10 @@
             </a:solidFill>
           </a:ln>
         </p:spPr>
+        <p:txBody xmlns:a="http://schemas.openxmlformats.org/drawingml/2006/main">
+          <a:bodyPr/>
+          <a:p/>
+        </p:txBody>
       </p:sp>
       <p:sp>
         <p:nvSpPr>
@@ -3964,6 +4003,10 @@
             <a:prstDash val="solid"/>
           </a:ln>
         </p:spPr>
+        <p:txBody xmlns:a="http://schemas.openxmlformats.org/drawingml/2006/main">
+          <a:bodyPr/>
+          <a:p/>
+        </p:txBody>
       </p:sp>
       <p:sp>
         <p:nvSpPr>
@@ -4113,6 +4156,10 @@
             <a:prstDash val="solid"/>
           </a:ln>
         </p:spPr>
+        <p:txBody xmlns:a="http://schemas.openxmlformats.org/drawingml/2006/main">
+          <a:bodyPr/>
+          <a:p/>
+        </p:txBody>
       </p:sp>
       <p:sp>
         <p:nvSpPr>
@@ -4435,6 +4482,10 @@
             <a:prstDash val="solid"/>
           </a:ln>
         </p:spPr>
+        <p:txBody xmlns:a="http://schemas.openxmlformats.org/drawingml/2006/main">
+          <a:bodyPr/>
+          <a:p/>
+        </p:txBody>
       </p:sp>
       <p:sp>
         <p:nvSpPr>
@@ -4584,6 +4635,10 @@
             <a:prstDash val="solid"/>
           </a:ln>
         </p:spPr>
+        <p:txBody xmlns:a="http://schemas.openxmlformats.org/drawingml/2006/main">
+          <a:bodyPr/>
+          <a:p/>
+        </p:txBody>
       </p:sp>
       <p:sp>
         <p:nvSpPr>
@@ -4966,6 +5021,10 @@
             </a:solidFill>
           </a:ln>
         </p:spPr>
+        <p:txBody xmlns:a="http://schemas.openxmlformats.org/drawingml/2006/main">
+          <a:bodyPr/>
+          <a:p/>
+        </p:txBody>
       </p:sp>
       <p:sp>
         <p:nvSpPr>
@@ -5053,6 +5112,10 @@
             </a:solidFill>
           </a:ln>
         </p:spPr>
+        <p:txBody xmlns:a="http://schemas.openxmlformats.org/drawingml/2006/main">
+          <a:bodyPr/>
+          <a:p/>
+        </p:txBody>
       </p:sp>
       <p:sp>
         <p:nvSpPr>
@@ -5133,7 +5196,7 @@
     </p:bg>
     <p:spTree>
       <p:nvGrpSpPr>
-        <p:cNvPr id="1" name=""/>
+        <p:cNvPr id="2" name=""/>
         <p:cNvGrpSpPr/>
         <p:nvPr/>
       </p:nvGrpSpPr>
@@ -5142,7 +5205,7 @@
       </p:grpSpPr>
       <p:sp>
         <p:nvSpPr>
-          <p:cNvPr id="11" name="top-rule">
+          <p:cNvPr id="3" name="top-rule">
             <a:extLst xmlns:a="http://schemas.openxmlformats.org/drawingml/2006/main">
               <a:ext uri="{FF2B5EF4-FFF2-40B4-BE49-F238E27FC236}">
                 <a16:creationId xmlns:a16="http://schemas.microsoft.com/office/drawing/2014/main" id="{49640CAB-E5CD-4236-AFA7-9E45E578E7C6}"/>
@@ -5170,10 +5233,14 @@
             <a:prstDash val="solid"/>
           </a:ln>
         </p:spPr>
-      </p:sp>
-      <p:sp>
-        <p:nvSpPr>
-          <p:cNvPr id="2" name="brand">
+        <p:txBody xmlns:a="http://schemas.openxmlformats.org/drawingml/2006/main">
+          <a:bodyPr/>
+          <a:p/>
+        </p:txBody>
+      </p:sp>
+      <p:sp>
+        <p:nvSpPr>
+          <p:cNvPr id="4" name="brand">
             <a:extLst xmlns:a="http://schemas.openxmlformats.org/drawingml/2006/main">
               <a:ext uri="{FF2B5EF4-FFF2-40B4-BE49-F238E27FC236}">
                 <a16:creationId xmlns:a16="http://schemas.microsoft.com/office/drawing/2014/main" id="{12D9CE57-F1C0-4820-9109-CB60B0CC04AA}"/>
@@ -5232,7 +5299,7 @@
       </p:sp>
       <p:sp>
         <p:nvSpPr>
-          <p:cNvPr id="3" name="title">
+          <p:cNvPr id="5" name="title">
             <a:extLst xmlns:a="http://schemas.openxmlformats.org/drawingml/2006/main">
               <a:ext uri="{FF2B5EF4-FFF2-40B4-BE49-F238E27FC236}">
                 <a16:creationId xmlns:a16="http://schemas.microsoft.com/office/drawing/2014/main" id="{0B8F7F10-77A5-4C42-9A6B-A3CA96BA08AE}"/>
@@ -5284,14 +5351,14 @@
                 <a:ea typeface="Calibri"/>
                 <a:cs typeface="Calibri"/>
               </a:rPr>
-              <a:t>Your voice can change the lesson</a:t>
-            </a:r>
-          </a:p>
-        </p:txBody>
-      </p:sp>
-      <p:sp>
-        <p:nvSpPr>
-          <p:cNvPr id="4" name="footer-line">
+              <a:t>Review the evidence</a:t>
+            </a:r>
+          </a:p>
+        </p:txBody>
+      </p:sp>
+      <p:sp>
+        <p:nvSpPr>
+          <p:cNvPr id="6" name="footer-line">
             <a:extLst xmlns:a="http://schemas.openxmlformats.org/drawingml/2006/main">
               <a:ext uri="{FF2B5EF4-FFF2-40B4-BE49-F238E27FC236}">
                 <a16:creationId xmlns:a16="http://schemas.microsoft.com/office/drawing/2014/main" id="{E4214430-E665-4402-808E-8A4F59D71AA4}"/>
@@ -5319,10 +5386,14 @@
             <a:prstDash val="solid"/>
           </a:ln>
         </p:spPr>
-      </p:sp>
-      <p:sp>
-        <p:nvSpPr>
-          <p:cNvPr id="5" name="footer">
+        <p:txBody xmlns:a="http://schemas.openxmlformats.org/drawingml/2006/main">
+          <a:bodyPr/>
+          <a:p/>
+        </p:txBody>
+      </p:sp>
+      <p:sp>
+        <p:nvSpPr>
+          <p:cNvPr id="7" name="footer">
             <a:extLst xmlns:a="http://schemas.openxmlformats.org/drawingml/2006/main">
               <a:ext uri="{FF2B5EF4-FFF2-40B4-BE49-F238E27FC236}">
                 <a16:creationId xmlns:a16="http://schemas.microsoft.com/office/drawing/2014/main" id="{EE0A833C-A68B-4F01-B371-F72EABF4236E}"/>
@@ -5381,7 +5452,7 @@
       </p:sp>
       <p:sp>
         <p:nvSpPr>
-          <p:cNvPr id="6" name="page">
+          <p:cNvPr id="8" name="page">
             <a:extLst xmlns:a="http://schemas.openxmlformats.org/drawingml/2006/main">
               <a:ext uri="{FF2B5EF4-FFF2-40B4-BE49-F238E27FC236}">
                 <a16:creationId xmlns:a16="http://schemas.microsoft.com/office/drawing/2014/main" id="{784B2860-16AF-45BC-9372-47681FD3E2FE}"/>
@@ -5440,30 +5511,78 @@
       </p:sp>
       <p:sp>
         <p:nvSpPr>
-          <p:cNvPr id="7" name="line-0">
-            <a:extLst xmlns:a="http://schemas.openxmlformats.org/drawingml/2006/main">
-              <a:ext uri="{FF2B5EF4-FFF2-40B4-BE49-F238E27FC236}">
-                <a16:creationId xmlns:a16="http://schemas.microsoft.com/office/drawing/2014/main" id="{20057B99-504D-4F62-ACA3-D2FC16D7B75F}"/>
-              </a:ext>
-            </a:extLst>
-          </p:cNvPr>
-          <p:cNvSpPr>
-            <a:spLocks xmlns:a="http://schemas.openxmlformats.org/drawingml/2006/main" noGrp="1"/>
-          </p:cNvSpPr>
-          <p:nvPr/>
-        </p:nvSpPr>
-        <p:spPr>
-          <a:xfrm xmlns:a="http://schemas.openxmlformats.org/drawingml/2006/main">
-            <a:off x="1000125" y="2333625"/>
-            <a:ext cx="10382250" cy="792956"/>
-          </a:xfrm>
-          <a:prstGeom xmlns:a="http://schemas.openxmlformats.org/drawingml/2006/main" prst="rect">
-            <a:avLst/>
-          </a:prstGeom>
-          <a:noFill xmlns:a="http://schemas.openxmlformats.org/drawingml/2006/main"/>
-          <a:ln xmlns:a="http://schemas.openxmlformats.org/drawingml/2006/main" w="0">
-            <a:noFill/>
-            <a:prstDash val="solid"/>
+          <p:cNvPr id="9" name="intro"/>
+          <p:cNvSpPr>
+            <a:spLocks xmlns:a="http://schemas.openxmlformats.org/drawingml/2006/main" noGrp="1"/>
+          </p:cNvSpPr>
+          <p:nvPr/>
+        </p:nvSpPr>
+        <p:spPr>
+          <a:xfrm xmlns:a="http://schemas.openxmlformats.org/drawingml/2006/main">
+            <a:off x="609904" y="2103120"/>
+            <a:ext cx="10972800" cy="566928"/>
+          </a:xfrm>
+          <a:prstGeom xmlns:a="http://schemas.openxmlformats.org/drawingml/2006/main" prst="rect">
+            <a:avLst/>
+          </a:prstGeom>
+          <a:solidFill xmlns:a="http://schemas.openxmlformats.org/drawingml/2006/main">
+            <a:srgbClr val="E7EFE9"/>
+          </a:solidFill>
+          <a:ln xmlns:a="http://schemas.openxmlformats.org/drawingml/2006/main" w="0">
+            <a:noFill/>
+            <a:prstDash val="solid"/>
+          </a:ln>
+        </p:spPr>
+        <p:txBody>
+          <a:bodyPr xmlns:a="http://schemas.openxmlformats.org/drawingml/2006/main" lIns="228600" tIns="114300" rIns="228600" bIns="114300" anchor="ctr">
+            <a:noAutofit/>
+          </a:bodyPr>
+          <a:lstStyle xmlns:a="http://schemas.openxmlformats.org/drawingml/2006/main"/>
+          <a:p xmlns:a="http://schemas.openxmlformats.org/drawingml/2006/main">
+            <a:pPr algn="l">
+              <a:buNone/>
+              <a:defRPr sz="1500" b="1">
+                <a:solidFill>
+                  <a:srgbClr val="28685E"/>
+                </a:solidFill>
+                <a:latin typeface="Calibri"/>
+                <a:ea typeface="Calibri"/>
+                <a:cs typeface="Calibri"/>
+              </a:defRPr>
+            </a:pPr>
+            <a:r>
+              <a:rPr sz="1500" b="1">
+                <a:solidFill>
+                  <a:srgbClr val="28685E"/>
+                </a:solidFill>
+                <a:latin typeface="Calibri"/>
+                <a:ea typeface="Calibri"/>
+                <a:cs typeface="Calibri"/>
+              </a:rPr>
+              <a:t>Use your existing results or the clearly labelled model data. Point, speak, sign, draw or use your current work; no extra feedback form is needed.</a:t>
+            </a:r>
+          </a:p>
+        </p:txBody>
+      </p:sp>
+      <p:sp>
+        <p:nvSpPr>
+          <p:cNvPr id="10" name="cue-0"/>
+          <p:cNvSpPr>
+            <a:spLocks xmlns:a="http://schemas.openxmlformats.org/drawingml/2006/main" noGrp="1"/>
+          </p:cNvSpPr>
+          <p:nvPr/>
+        </p:nvSpPr>
+        <p:spPr>
+          <a:xfrm xmlns:a="http://schemas.openxmlformats.org/drawingml/2006/main">
+            <a:off x="609904" y="2971800"/>
+            <a:ext cx="320040" cy="320040"/>
+          </a:xfrm>
+          <a:prstGeom xmlns:a="http://schemas.openxmlformats.org/drawingml/2006/main" prst="rect">
+            <a:avLst/>
+          </a:prstGeom>
+          <a:noFill xmlns:a="http://schemas.openxmlformats.org/drawingml/2006/main"/>
+          <a:ln xmlns:a="http://schemas.openxmlformats.org/drawingml/2006/main" w="0">
+            <a:noFill/>
           </a:ln>
         </p:spPr>
         <p:txBody>
@@ -5473,8 +5592,60 @@
           <a:lstStyle xmlns:a="http://schemas.openxmlformats.org/drawingml/2006/main"/>
           <a:p xmlns:a="http://schemas.openxmlformats.org/drawingml/2006/main">
             <a:pPr algn="l">
+              <a:defRPr sz="1350" b="1">
+                <a:solidFill>
+                  <a:srgbClr val="28685E"/>
+                </a:solidFill>
+                <a:latin typeface="Calibri"/>
+                <a:ea typeface="Calibri"/>
+                <a:cs typeface="Calibri"/>
+              </a:defRPr>
+            </a:pPr>
+            <a:r>
+              <a:rPr sz="1350" b="1">
+                <a:solidFill>
+                  <a:srgbClr val="28685E"/>
+                </a:solidFill>
+                <a:latin typeface="Calibri"/>
+                <a:ea typeface="Calibri"/>
+                <a:cs typeface="Calibri"/>
+              </a:rPr>
+              <a:t>01</a:t>
+            </a:r>
+          </a:p>
+        </p:txBody>
+      </p:sp>
+      <p:sp>
+        <p:nvSpPr>
+          <p:cNvPr id="11" name="line-0"/>
+          <p:cNvSpPr>
+            <a:spLocks xmlns:a="http://schemas.openxmlformats.org/drawingml/2006/main" noGrp="1"/>
+          </p:cNvSpPr>
+          <p:nvPr/>
+        </p:nvSpPr>
+        <p:spPr>
+          <a:xfrm xmlns:a="http://schemas.openxmlformats.org/drawingml/2006/main">
+            <a:off x="996696" y="2788920"/>
+            <a:ext cx="10378440" cy="731520"/>
+          </a:xfrm>
+          <a:prstGeom xmlns:a="http://schemas.openxmlformats.org/drawingml/2006/main" prst="rect">
+            <a:avLst/>
+          </a:prstGeom>
+          <a:noFill xmlns:a="http://schemas.openxmlformats.org/drawingml/2006/main"/>
+          <a:ln xmlns:a="http://schemas.openxmlformats.org/drawingml/2006/main" w="0">
+            <a:noFill/>
+            <a:prstDash val="solid"/>
+          </a:ln>
+        </p:spPr>
+        <p:txBody>
+          <a:bodyPr xmlns:a="http://schemas.openxmlformats.org/drawingml/2006/main" lIns="0" tIns="0" rIns="0" bIns="0" anchor="ctr">
+            <a:noAutofit/>
+          </a:bodyPr>
+          <a:lstStyle xmlns:a="http://schemas.openxmlformats.org/drawingml/2006/main"/>
+          <a:p xmlns:a="http://schemas.openxmlformats.org/drawingml/2006/main">
+            <a:pPr algn="l">
               <a:buNone/>
-              <a:defRPr sz="2400" b="0">
+              <a:defRPr sz="1700" b="0">
                 <a:solidFill>
                   <a:srgbClr val="152B3A"/>
                 </a:solidFill>
@@ -5484,7 +5655,7 @@
               </a:defRPr>
             </a:pPr>
             <a:r>
-              <a:rPr sz="2400" b="0">
+              <a:rPr sz="1700" b="0">
                 <a:solidFill>
                   <a:srgbClr val="152B3A"/>
                 </a:solidFill>
@@ -5492,263 +5663,23 @@
                 <a:ea typeface="Calibri"/>
                 <a:cs typeface="Calibri"/>
               </a:rPr>
-              <a:t>What helped you test, observe or record?</a:t>
-            </a:r>
-          </a:p>
-        </p:txBody>
-      </p:sp>
-      <p:sp>
-        <p:nvSpPr>
-          <p:cNvPr id="8" name="line-1">
-            <a:extLst xmlns:a="http://schemas.openxmlformats.org/drawingml/2006/main">
-              <a:ext uri="{FF2B5EF4-FFF2-40B4-BE49-F238E27FC236}">
-                <a16:creationId xmlns:a16="http://schemas.microsoft.com/office/drawing/2014/main" id="{A0C90B9E-3978-48FF-938A-B34B2828853A}"/>
-              </a:ext>
-            </a:extLst>
-          </p:cNvPr>
-          <p:cNvSpPr>
-            <a:spLocks xmlns:a="http://schemas.openxmlformats.org/drawingml/2006/main" noGrp="1"/>
-          </p:cNvSpPr>
-          <p:nvPr/>
-        </p:nvSpPr>
-        <p:spPr>
-          <a:xfrm xmlns:a="http://schemas.openxmlformats.org/drawingml/2006/main">
-            <a:off x="1000125" y="3183731"/>
-            <a:ext cx="10382250" cy="792956"/>
-          </a:xfrm>
-          <a:prstGeom xmlns:a="http://schemas.openxmlformats.org/drawingml/2006/main" prst="rect">
-            <a:avLst/>
-          </a:prstGeom>
-          <a:noFill xmlns:a="http://schemas.openxmlformats.org/drawingml/2006/main"/>
-          <a:ln xmlns:a="http://schemas.openxmlformats.org/drawingml/2006/main" w="0">
-            <a:noFill/>
-            <a:prstDash val="solid"/>
-          </a:ln>
-        </p:spPr>
-        <p:txBody>
-          <a:bodyPr xmlns:a="http://schemas.openxmlformats.org/drawingml/2006/main" lIns="0" tIns="0" rIns="0" bIns="0" anchor="ctr">
-            <a:noAutofit/>
-          </a:bodyPr>
-          <a:lstStyle xmlns:a="http://schemas.openxmlformats.org/drawingml/2006/main"/>
-          <a:p xmlns:a="http://schemas.openxmlformats.org/drawingml/2006/main">
-            <a:pPr algn="l">
-              <a:buNone/>
-              <a:defRPr sz="2400" b="0">
-                <a:solidFill>
-                  <a:srgbClr val="152B3A"/>
-                </a:solidFill>
-                <a:latin typeface="Calibri"/>
-                <a:ea typeface="Calibri"/>
-                <a:cs typeface="Calibri"/>
-              </a:defRPr>
-            </a:pPr>
-            <a:r>
-              <a:rPr sz="2400" b="0">
-                <a:solidFill>
-                  <a:srgbClr val="152B3A"/>
-                </a:solidFill>
-                <a:latin typeface="Calibri"/>
-                <a:ea typeface="Calibri"/>
-                <a:cs typeface="Calibri"/>
-              </a:rPr>
-              <a:t>What could make the next activity easier to access?</a:t>
-            </a:r>
-          </a:p>
-        </p:txBody>
-      </p:sp>
-      <p:sp>
-        <p:nvSpPr>
-          <p:cNvPr id="9" name="line-2">
-            <a:extLst xmlns:a="http://schemas.openxmlformats.org/drawingml/2006/main">
-              <a:ext uri="{FF2B5EF4-FFF2-40B4-BE49-F238E27FC236}">
-                <a16:creationId xmlns:a16="http://schemas.microsoft.com/office/drawing/2014/main" id="{ACBBE038-2743-4FB1-9C6E-0F8EA59B05C6}"/>
-              </a:ext>
-            </a:extLst>
-          </p:cNvPr>
-          <p:cNvSpPr>
-            <a:spLocks xmlns:a="http://schemas.openxmlformats.org/drawingml/2006/main" noGrp="1"/>
-          </p:cNvSpPr>
-          <p:nvPr/>
-        </p:nvSpPr>
-        <p:spPr>
-          <a:xfrm xmlns:a="http://schemas.openxmlformats.org/drawingml/2006/main">
-            <a:off x="1000125" y="4033838"/>
-            <a:ext cx="10382250" cy="792956"/>
-          </a:xfrm>
-          <a:prstGeom xmlns:a="http://schemas.openxmlformats.org/drawingml/2006/main" prst="rect">
-            <a:avLst/>
-          </a:prstGeom>
-          <a:noFill xmlns:a="http://schemas.openxmlformats.org/drawingml/2006/main"/>
-          <a:ln xmlns:a="http://schemas.openxmlformats.org/drawingml/2006/main" w="0">
-            <a:noFill/>
-            <a:prstDash val="solid"/>
-          </a:ln>
-        </p:spPr>
-        <p:txBody>
-          <a:bodyPr xmlns:a="http://schemas.openxmlformats.org/drawingml/2006/main" lIns="0" tIns="0" rIns="0" bIns="0" anchor="ctr">
-            <a:noAutofit/>
-          </a:bodyPr>
-          <a:lstStyle xmlns:a="http://schemas.openxmlformats.org/drawingml/2006/main"/>
-          <a:p xmlns:a="http://schemas.openxmlformats.org/drawingml/2006/main">
-            <a:pPr algn="l">
-              <a:buNone/>
-              <a:defRPr sz="2400" b="0">
-                <a:solidFill>
-                  <a:srgbClr val="152B3A"/>
-                </a:solidFill>
-                <a:latin typeface="Calibri"/>
-                <a:ea typeface="Calibri"/>
-                <a:cs typeface="Calibri"/>
-              </a:defRPr>
-            </a:pPr>
-            <a:r>
-              <a:rPr sz="2400" b="0">
-                <a:solidFill>
-                  <a:srgbClr val="152B3A"/>
-                </a:solidFill>
-                <a:latin typeface="Calibri"/>
-                <a:ea typeface="Calibri"/>
-                <a:cs typeface="Calibri"/>
-              </a:rPr>
-              <a:t>Point, sign, speak, write—or pass privately.</a:t>
-            </a:r>
-          </a:p>
-        </p:txBody>
-      </p:sp>
-      <p:sp>
-        <p:nvSpPr>
-          <p:cNvPr id="10" name="line-3">
-            <a:extLst xmlns:a="http://schemas.openxmlformats.org/drawingml/2006/main">
-              <a:ext uri="{FF2B5EF4-FFF2-40B4-BE49-F238E27FC236}">
-                <a16:creationId xmlns:a16="http://schemas.microsoft.com/office/drawing/2014/main" id="{791F48A2-D450-46E6-9E69-60A9B8B61597}"/>
-              </a:ext>
-            </a:extLst>
-          </p:cNvPr>
-          <p:cNvSpPr>
-            <a:spLocks xmlns:a="http://schemas.openxmlformats.org/drawingml/2006/main" noGrp="1"/>
-          </p:cNvSpPr>
-          <p:nvPr/>
-        </p:nvSpPr>
-        <p:spPr>
-          <a:xfrm xmlns:a="http://schemas.openxmlformats.org/drawingml/2006/main">
-            <a:off x="1000125" y="4883944"/>
-            <a:ext cx="10382250" cy="792956"/>
-          </a:xfrm>
-          <a:prstGeom xmlns:a="http://schemas.openxmlformats.org/drawingml/2006/main" prst="rect">
-            <a:avLst/>
-          </a:prstGeom>
-          <a:noFill xmlns:a="http://schemas.openxmlformats.org/drawingml/2006/main"/>
-          <a:ln xmlns:a="http://schemas.openxmlformats.org/drawingml/2006/main" w="0">
-            <a:noFill/>
-            <a:prstDash val="solid"/>
-          </a:ln>
-        </p:spPr>
-        <p:txBody>
-          <a:bodyPr xmlns:a="http://schemas.openxmlformats.org/drawingml/2006/main" lIns="0" tIns="0" rIns="0" bIns="0" anchor="ctr">
-            <a:noAutofit/>
-          </a:bodyPr>
-          <a:lstStyle xmlns:a="http://schemas.openxmlformats.org/drawingml/2006/main"/>
-          <a:p xmlns:a="http://schemas.openxmlformats.org/drawingml/2006/main">
-            <a:pPr algn="l">
-              <a:buNone/>
-              <a:defRPr sz="2400" b="0">
-                <a:solidFill>
-                  <a:srgbClr val="152B3A"/>
-                </a:solidFill>
-                <a:latin typeface="Calibri"/>
-                <a:ea typeface="Calibri"/>
-                <a:cs typeface="Calibri"/>
-              </a:defRPr>
-            </a:pPr>
-            <a:r>
-              <a:rPr sz="2400" b="0">
-                <a:solidFill>
-                  <a:srgbClr val="152B3A"/>
-                </a:solidFill>
-                <a:latin typeface="Calibri"/>
-                <a:ea typeface="Calibri"/>
-                <a:cs typeface="Calibri"/>
-              </a:rPr>
-              <a:t>Adult: agree one change and explain any limit.</a:t>
-            </a:r>
-          </a:p>
-        </p:txBody>
-      </p:sp>
-      <p:sp>
-        <p:nvSpPr>
-          <p:cNvPr id="12" name="cue-0">
-            <a:extLst xmlns:a="http://schemas.openxmlformats.org/drawingml/2006/main">
-              <a:ext uri="{FF2B5EF4-FFF2-40B4-BE49-F238E27FC236}">
-                <a16:creationId xmlns:a16="http://schemas.microsoft.com/office/drawing/2014/main" id="{1A0B4F9D-AE68-47B9-9EC7-F9A6D229D107}"/>
-              </a:ext>
-            </a:extLst>
-          </p:cNvPr>
-          <p:cNvSpPr>
-            <a:spLocks xmlns:a="http://schemas.openxmlformats.org/drawingml/2006/main" noGrp="1"/>
-          </p:cNvSpPr>
-          <p:nvPr/>
-        </p:nvSpPr>
-        <p:spPr>
-          <a:xfrm xmlns:a="http://schemas.openxmlformats.org/drawingml/2006/main">
-            <a:off x="609600" y="2362200"/>
-            <a:ext cx="323850" cy="323850"/>
-          </a:xfrm>
-          <a:prstGeom xmlns:a="http://schemas.openxmlformats.org/drawingml/2006/main" prst="rect">
-            <a:avLst/>
-          </a:prstGeom>
-          <a:noFill xmlns:a="http://schemas.openxmlformats.org/drawingml/2006/main"/>
-          <a:ln xmlns:a="http://schemas.openxmlformats.org/drawingml/2006/main" w="0">
-            <a:noFill/>
-          </a:ln>
-        </p:spPr>
-        <p:txBody>
-          <a:bodyPr xmlns:a="http://schemas.openxmlformats.org/drawingml/2006/main" lIns="0" tIns="0" rIns="0" bIns="0" anchor="ctr">
-            <a:noAutofit/>
-          </a:bodyPr>
-          <a:lstStyle xmlns:a="http://schemas.openxmlformats.org/drawingml/2006/main"/>
-          <a:p xmlns:a="http://schemas.openxmlformats.org/drawingml/2006/main">
-            <a:pPr algn="l">
-              <a:defRPr sz="1350" b="1">
-                <a:solidFill>
-                  <a:srgbClr val="28685E"/>
-                </a:solidFill>
-                <a:latin typeface="Calibri"/>
-                <a:ea typeface="Calibri"/>
-                <a:cs typeface="Calibri"/>
-              </a:defRPr>
-            </a:pPr>
-            <a:r>
-              <a:rPr sz="1350" b="1">
-                <a:solidFill>
-                  <a:srgbClr val="28685E"/>
-                </a:solidFill>
-                <a:latin typeface="Calibri"/>
-                <a:ea typeface="Calibri"/>
-                <a:cs typeface="Calibri"/>
-              </a:rPr>
-              <a:t>01</a:t>
-            </a:r>
-          </a:p>
-        </p:txBody>
-      </p:sp>
-      <p:sp>
-        <p:nvSpPr>
-          <p:cNvPr id="13" name="row-rule-0">
-            <a:extLst xmlns:a="http://schemas.openxmlformats.org/drawingml/2006/main">
-              <a:ext uri="{FF2B5EF4-FFF2-40B4-BE49-F238E27FC236}">
-                <a16:creationId xmlns:a16="http://schemas.microsoft.com/office/drawing/2014/main" id="{A74C17F5-69E5-464D-BCE5-3E875B7571E7}"/>
-              </a:ext>
-            </a:extLst>
-          </p:cNvPr>
-          <p:cNvSpPr>
-            <a:spLocks xmlns:a="http://schemas.openxmlformats.org/drawingml/2006/main" noGrp="1"/>
-          </p:cNvSpPr>
-          <p:nvPr/>
-        </p:nvSpPr>
-        <p:spPr>
-          <a:xfrm xmlns:a="http://schemas.openxmlformats.org/drawingml/2006/main">
-            <a:off x="1000125" y="3136106"/>
-            <a:ext cx="10334625" cy="0"/>
+              <a:t>Choose one conclusion. Show the adult which results support it. Name the surfaces and whether the evidence is measured or model data.</a:t>
+            </a:r>
+          </a:p>
+        </p:txBody>
+      </p:sp>
+      <p:sp>
+        <p:nvSpPr>
+          <p:cNvPr id="12" name="row-rule-0"/>
+          <p:cNvSpPr>
+            <a:spLocks xmlns:a="http://schemas.openxmlformats.org/drawingml/2006/main" noGrp="1"/>
+          </p:cNvSpPr>
+          <p:nvPr/>
+        </p:nvSpPr>
+        <p:spPr>
+          <a:xfrm xmlns:a="http://schemas.openxmlformats.org/drawingml/2006/main">
+            <a:off x="996696" y="3547872"/>
+            <a:ext cx="10332720" cy="0"/>
           </a:xfrm>
           <a:prstGeom xmlns:a="http://schemas.openxmlformats.org/drawingml/2006/main" prst="line">
             <a:avLst/>
@@ -5760,25 +5691,23 @@
             </a:solidFill>
           </a:ln>
         </p:spPr>
-      </p:sp>
-      <p:sp>
-        <p:nvSpPr>
-          <p:cNvPr id="14" name="cue-1">
-            <a:extLst xmlns:a="http://schemas.openxmlformats.org/drawingml/2006/main">
-              <a:ext uri="{FF2B5EF4-FFF2-40B4-BE49-F238E27FC236}">
-                <a16:creationId xmlns:a16="http://schemas.microsoft.com/office/drawing/2014/main" id="{CABFCB84-9D03-4357-8017-4A1C055D3E7E}"/>
-              </a:ext>
-            </a:extLst>
-          </p:cNvPr>
-          <p:cNvSpPr>
-            <a:spLocks xmlns:a="http://schemas.openxmlformats.org/drawingml/2006/main" noGrp="1"/>
-          </p:cNvSpPr>
-          <p:nvPr/>
-        </p:nvSpPr>
-        <p:spPr>
-          <a:xfrm xmlns:a="http://schemas.openxmlformats.org/drawingml/2006/main">
-            <a:off x="609600" y="3212306"/>
-            <a:ext cx="323850" cy="323850"/>
+        <p:txBody xmlns:a="http://schemas.openxmlformats.org/drawingml/2006/main">
+          <a:bodyPr/>
+          <a:p/>
+        </p:txBody>
+      </p:sp>
+      <p:sp>
+        <p:nvSpPr>
+          <p:cNvPr id="13" name="cue-1"/>
+          <p:cNvSpPr>
+            <a:spLocks xmlns:a="http://schemas.openxmlformats.org/drawingml/2006/main" noGrp="1"/>
+          </p:cNvSpPr>
+          <p:nvPr/>
+        </p:nvSpPr>
+        <p:spPr>
+          <a:xfrm xmlns:a="http://schemas.openxmlformats.org/drawingml/2006/main">
+            <a:off x="609904" y="3794759"/>
+            <a:ext cx="320040" cy="320040"/>
           </a:xfrm>
           <a:prstGeom xmlns:a="http://schemas.openxmlformats.org/drawingml/2006/main" prst="rect">
             <a:avLst/>
@@ -5820,22 +5749,69 @@
       </p:sp>
       <p:sp>
         <p:nvSpPr>
-          <p:cNvPr id="15" name="row-rule-1">
-            <a:extLst xmlns:a="http://schemas.openxmlformats.org/drawingml/2006/main">
-              <a:ext uri="{FF2B5EF4-FFF2-40B4-BE49-F238E27FC236}">
-                <a16:creationId xmlns:a16="http://schemas.microsoft.com/office/drawing/2014/main" id="{AEF8648C-073A-42F2-8114-C700958A4490}"/>
-              </a:ext>
-            </a:extLst>
-          </p:cNvPr>
-          <p:cNvSpPr>
-            <a:spLocks xmlns:a="http://schemas.openxmlformats.org/drawingml/2006/main" noGrp="1"/>
-          </p:cNvSpPr>
-          <p:nvPr/>
-        </p:nvSpPr>
-        <p:spPr>
-          <a:xfrm xmlns:a="http://schemas.openxmlformats.org/drawingml/2006/main">
-            <a:off x="1000125" y="3986213"/>
-            <a:ext cx="10334625" cy="0"/>
+          <p:cNvPr id="14" name="line-1"/>
+          <p:cNvSpPr>
+            <a:spLocks xmlns:a="http://schemas.openxmlformats.org/drawingml/2006/main" noGrp="1"/>
+          </p:cNvSpPr>
+          <p:nvPr/>
+        </p:nvSpPr>
+        <p:spPr>
+          <a:xfrm xmlns:a="http://schemas.openxmlformats.org/drawingml/2006/main">
+            <a:off x="996696" y="3611879"/>
+            <a:ext cx="10378440" cy="731520"/>
+          </a:xfrm>
+          <a:prstGeom xmlns:a="http://schemas.openxmlformats.org/drawingml/2006/main" prst="rect">
+            <a:avLst/>
+          </a:prstGeom>
+          <a:noFill xmlns:a="http://schemas.openxmlformats.org/drawingml/2006/main"/>
+          <a:ln xmlns:a="http://schemas.openxmlformats.org/drawingml/2006/main" w="0">
+            <a:noFill/>
+            <a:prstDash val="solid"/>
+          </a:ln>
+        </p:spPr>
+        <p:txBody>
+          <a:bodyPr xmlns:a="http://schemas.openxmlformats.org/drawingml/2006/main" lIns="0" tIns="0" rIns="0" bIns="0" anchor="ctr">
+            <a:noAutofit/>
+          </a:bodyPr>
+          <a:lstStyle xmlns:a="http://schemas.openxmlformats.org/drawingml/2006/main"/>
+          <a:p xmlns:a="http://schemas.openxmlformats.org/drawingml/2006/main">
+            <a:pPr algn="l">
+              <a:buNone/>
+              <a:defRPr sz="1700" b="0">
+                <a:solidFill>
+                  <a:srgbClr val="152B3A"/>
+                </a:solidFill>
+                <a:latin typeface="Calibri"/>
+                <a:ea typeface="Calibri"/>
+                <a:cs typeface="Calibri"/>
+              </a:defRPr>
+            </a:pPr>
+            <a:r>
+              <a:rPr sz="1700" b="0">
+                <a:solidFill>
+                  <a:srgbClr val="152B3A"/>
+                </a:solidFill>
+                <a:latin typeface="Calibri"/>
+                <a:ea typeface="Calibri"/>
+                <a:cs typeface="Calibri"/>
+              </a:rPr>
+              <a:t>Consider the feedback. Does the conclusion fit both trials? Check one control or uncertainty; a surprising result is not automatically wrong.</a:t>
+            </a:r>
+          </a:p>
+        </p:txBody>
+      </p:sp>
+      <p:sp>
+        <p:nvSpPr>
+          <p:cNvPr id="15" name="row-rule-1"/>
+          <p:cNvSpPr>
+            <a:spLocks xmlns:a="http://schemas.openxmlformats.org/drawingml/2006/main" noGrp="1"/>
+          </p:cNvSpPr>
+          <p:nvPr/>
+        </p:nvSpPr>
+        <p:spPr>
+          <a:xfrm xmlns:a="http://schemas.openxmlformats.org/drawingml/2006/main">
+            <a:off x="996696" y="4370831"/>
+            <a:ext cx="10332720" cy="0"/>
           </a:xfrm>
           <a:prstGeom xmlns:a="http://schemas.openxmlformats.org/drawingml/2006/main" prst="line">
             <a:avLst/>
@@ -5847,25 +5823,23 @@
             </a:solidFill>
           </a:ln>
         </p:spPr>
-      </p:sp>
-      <p:sp>
-        <p:nvSpPr>
-          <p:cNvPr id="16" name="cue-2">
-            <a:extLst xmlns:a="http://schemas.openxmlformats.org/drawingml/2006/main">
-              <a:ext uri="{FF2B5EF4-FFF2-40B4-BE49-F238E27FC236}">
-                <a16:creationId xmlns:a16="http://schemas.microsoft.com/office/drawing/2014/main" id="{28EFB03A-5DAF-40B8-90C5-F5D99C809641}"/>
-              </a:ext>
-            </a:extLst>
-          </p:cNvPr>
-          <p:cNvSpPr>
-            <a:spLocks xmlns:a="http://schemas.openxmlformats.org/drawingml/2006/main" noGrp="1"/>
-          </p:cNvSpPr>
-          <p:nvPr/>
-        </p:nvSpPr>
-        <p:spPr>
-          <a:xfrm xmlns:a="http://schemas.openxmlformats.org/drawingml/2006/main">
-            <a:off x="609600" y="4062413"/>
-            <a:ext cx="323850" cy="323850"/>
+        <p:txBody xmlns:a="http://schemas.openxmlformats.org/drawingml/2006/main">
+          <a:bodyPr/>
+          <a:p/>
+        </p:txBody>
+      </p:sp>
+      <p:sp>
+        <p:nvSpPr>
+          <p:cNvPr id="16" name="cue-2"/>
+          <p:cNvSpPr>
+            <a:spLocks xmlns:a="http://schemas.openxmlformats.org/drawingml/2006/main" noGrp="1"/>
+          </p:cNvSpPr>
+          <p:nvPr/>
+        </p:nvSpPr>
+        <p:spPr>
+          <a:xfrm xmlns:a="http://schemas.openxmlformats.org/drawingml/2006/main">
+            <a:off x="609904" y="4617720"/>
+            <a:ext cx="320040" cy="320040"/>
           </a:xfrm>
           <a:prstGeom xmlns:a="http://schemas.openxmlformats.org/drawingml/2006/main" prst="rect">
             <a:avLst/>
@@ -5907,22 +5881,69 @@
       </p:sp>
       <p:sp>
         <p:nvSpPr>
-          <p:cNvPr id="17" name="row-rule-2">
-            <a:extLst xmlns:a="http://schemas.openxmlformats.org/drawingml/2006/main">
-              <a:ext uri="{FF2B5EF4-FFF2-40B4-BE49-F238E27FC236}">
-                <a16:creationId xmlns:a16="http://schemas.microsoft.com/office/drawing/2014/main" id="{9E654105-9420-43C6-83E5-ECF5A42C4B72}"/>
-              </a:ext>
-            </a:extLst>
-          </p:cNvPr>
-          <p:cNvSpPr>
-            <a:spLocks xmlns:a="http://schemas.openxmlformats.org/drawingml/2006/main" noGrp="1"/>
-          </p:cNvSpPr>
-          <p:nvPr/>
-        </p:nvSpPr>
-        <p:spPr>
-          <a:xfrm xmlns:a="http://schemas.openxmlformats.org/drawingml/2006/main">
-            <a:off x="1000125" y="4836319"/>
-            <a:ext cx="10334625" cy="0"/>
+          <p:cNvPr id="17" name="line-2"/>
+          <p:cNvSpPr>
+            <a:spLocks xmlns:a="http://schemas.openxmlformats.org/drawingml/2006/main" noGrp="1"/>
+          </p:cNvSpPr>
+          <p:nvPr/>
+        </p:nvSpPr>
+        <p:spPr>
+          <a:xfrm xmlns:a="http://schemas.openxmlformats.org/drawingml/2006/main">
+            <a:off x="996696" y="4434840"/>
+            <a:ext cx="10378440" cy="731520"/>
+          </a:xfrm>
+          <a:prstGeom xmlns:a="http://schemas.openxmlformats.org/drawingml/2006/main" prst="rect">
+            <a:avLst/>
+          </a:prstGeom>
+          <a:noFill xmlns:a="http://schemas.openxmlformats.org/drawingml/2006/main"/>
+          <a:ln xmlns:a="http://schemas.openxmlformats.org/drawingml/2006/main" w="0">
+            <a:noFill/>
+            <a:prstDash val="solid"/>
+          </a:ln>
+        </p:spPr>
+        <p:txBody>
+          <a:bodyPr xmlns:a="http://schemas.openxmlformats.org/drawingml/2006/main" lIns="0" tIns="0" rIns="0" bIns="0" anchor="ctr">
+            <a:noAutofit/>
+          </a:bodyPr>
+          <a:lstStyle xmlns:a="http://schemas.openxmlformats.org/drawingml/2006/main"/>
+          <a:p xmlns:a="http://schemas.openxmlformats.org/drawingml/2006/main">
+            <a:pPr algn="l">
+              <a:buNone/>
+              <a:defRPr sz="1700" b="0">
+                <a:solidFill>
+                  <a:srgbClr val="152B3A"/>
+                </a:solidFill>
+                <a:latin typeface="Calibri"/>
+                <a:ea typeface="Calibri"/>
+                <a:cs typeface="Calibri"/>
+              </a:defRPr>
+            </a:pPr>
+            <a:r>
+              <a:rPr sz="1700" b="0">
+                <a:solidFill>
+                  <a:srgbClr val="152B3A"/>
+                </a:solidFill>
+                <a:latin typeface="Calibri"/>
+                <a:ea typeface="Calibri"/>
+                <a:cs typeface="Calibri"/>
+              </a:rPr>
+              <a:t>Keep or improve your explanation and show why. The adult responds to your idea or question. Keep the original results; label any later retry separately.</a:t>
+            </a:r>
+          </a:p>
+        </p:txBody>
+      </p:sp>
+      <p:sp>
+        <p:nvSpPr>
+          <p:cNvPr id="18" name="row-rule-2"/>
+          <p:cNvSpPr>
+            <a:spLocks xmlns:a="http://schemas.openxmlformats.org/drawingml/2006/main" noGrp="1"/>
+          </p:cNvSpPr>
+          <p:nvPr/>
+        </p:nvSpPr>
+        <p:spPr>
+          <a:xfrm xmlns:a="http://schemas.openxmlformats.org/drawingml/2006/main">
+            <a:off x="996696" y="5193792"/>
+            <a:ext cx="10332720" cy="0"/>
           </a:xfrm>
           <a:prstGeom xmlns:a="http://schemas.openxmlformats.org/drawingml/2006/main" prst="line">
             <a:avLst/>
@@ -5934,60 +5955,117 @@
             </a:solidFill>
           </a:ln>
         </p:spPr>
-      </p:sp>
-      <p:sp>
-        <p:nvSpPr>
-          <p:cNvPr id="18" name="cue-3">
-            <a:extLst xmlns:a="http://schemas.openxmlformats.org/drawingml/2006/main">
-              <a:ext uri="{FF2B5EF4-FFF2-40B4-BE49-F238E27FC236}">
-                <a16:creationId xmlns:a16="http://schemas.microsoft.com/office/drawing/2014/main" id="{E0F7C49F-CE78-4915-AEA4-CF0BF60C505F}"/>
-              </a:ext>
-            </a:extLst>
-          </p:cNvPr>
-          <p:cNvSpPr>
-            <a:spLocks xmlns:a="http://schemas.openxmlformats.org/drawingml/2006/main" noGrp="1"/>
-          </p:cNvSpPr>
-          <p:nvPr/>
-        </p:nvSpPr>
-        <p:spPr>
-          <a:xfrm xmlns:a="http://schemas.openxmlformats.org/drawingml/2006/main">
-            <a:off x="609600" y="4912519"/>
-            <a:ext cx="323850" cy="323850"/>
-          </a:xfrm>
-          <a:prstGeom xmlns:a="http://schemas.openxmlformats.org/drawingml/2006/main" prst="rect">
-            <a:avLst/>
-          </a:prstGeom>
-          <a:noFill xmlns:a="http://schemas.openxmlformats.org/drawingml/2006/main"/>
-          <a:ln xmlns:a="http://schemas.openxmlformats.org/drawingml/2006/main" w="0">
-            <a:noFill/>
-          </a:ln>
-        </p:spPr>
-        <p:txBody>
-          <a:bodyPr xmlns:a="http://schemas.openxmlformats.org/drawingml/2006/main" lIns="0" tIns="0" rIns="0" bIns="0" anchor="ctr">
-            <a:noAutofit/>
-          </a:bodyPr>
-          <a:lstStyle xmlns:a="http://schemas.openxmlformats.org/drawingml/2006/main"/>
-          <a:p xmlns:a="http://schemas.openxmlformats.org/drawingml/2006/main">
-            <a:pPr algn="l">
-              <a:defRPr sz="1350" b="1">
-                <a:solidFill>
-                  <a:srgbClr val="28685E"/>
-                </a:solidFill>
-                <a:latin typeface="Calibri"/>
-                <a:ea typeface="Calibri"/>
-                <a:cs typeface="Calibri"/>
-              </a:defRPr>
-            </a:pPr>
-            <a:r>
-              <a:rPr sz="1350" b="1">
-                <a:solidFill>
-                  <a:srgbClr val="28685E"/>
-                </a:solidFill>
-                <a:latin typeface="Calibri"/>
-                <a:ea typeface="Calibri"/>
-                <a:cs typeface="Calibri"/>
-              </a:rPr>
-              <a:t>04</a:t>
+        <p:txBody xmlns:a="http://schemas.openxmlformats.org/drawingml/2006/main">
+          <a:bodyPr/>
+          <a:p/>
+        </p:txBody>
+      </p:sp>
+      <p:sp>
+        <p:nvSpPr>
+          <p:cNvPr id="19" name="close"/>
+          <p:cNvSpPr>
+            <a:spLocks xmlns:a="http://schemas.openxmlformats.org/drawingml/2006/main" noGrp="1"/>
+          </p:cNvSpPr>
+          <p:nvPr/>
+        </p:nvSpPr>
+        <p:spPr>
+          <a:xfrm xmlns:a="http://schemas.openxmlformats.org/drawingml/2006/main">
+            <a:off x="609904" y="5285232"/>
+            <a:ext cx="10972800" cy="365760"/>
+          </a:xfrm>
+          <a:prstGeom xmlns:a="http://schemas.openxmlformats.org/drawingml/2006/main" prst="rect">
+            <a:avLst/>
+          </a:prstGeom>
+          <a:solidFill xmlns:a="http://schemas.openxmlformats.org/drawingml/2006/main">
+            <a:srgbClr val="E7EFE9"/>
+          </a:solidFill>
+          <a:ln xmlns:a="http://schemas.openxmlformats.org/drawingml/2006/main" w="0">
+            <a:noFill/>
+            <a:prstDash val="solid"/>
+          </a:ln>
+        </p:spPr>
+        <p:txBody>
+          <a:bodyPr xmlns:a="http://schemas.openxmlformats.org/drawingml/2006/main" lIns="228600" tIns="114300" rIns="228600" bIns="114300" anchor="ctr">
+            <a:noAutofit/>
+          </a:bodyPr>
+          <a:lstStyle xmlns:a="http://schemas.openxmlformats.org/drawingml/2006/main"/>
+          <a:p xmlns:a="http://schemas.openxmlformats.org/drawingml/2006/main">
+            <a:pPr algn="l">
+              <a:buNone/>
+              <a:defRPr sz="1300" b="1">
+                <a:solidFill>
+                  <a:srgbClr val="28685E"/>
+                </a:solidFill>
+                <a:latin typeface="Calibri"/>
+                <a:ea typeface="Calibri"/>
+                <a:cs typeface="Calibri"/>
+              </a:defRPr>
+            </a:pPr>
+            <a:r>
+              <a:rPr sz="1300" b="1">
+                <a:solidFill>
+                  <a:srgbClr val="28685E"/>
+                </a:solidFill>
+                <a:latin typeface="Calibri"/>
+                <a:ea typeface="Calibri"/>
+                <a:cs typeface="Calibri"/>
+              </a:rPr>
+              <a:t>You may ask for more thinking time, use a trusted adult or pass. Finish with the existing exit question; this review stays within its four minutes.</a:t>
+            </a:r>
+          </a:p>
+        </p:txBody>
+      </p:sp>
+      <p:sp>
+        <p:nvSpPr>
+          <p:cNvPr id="20" name="help-prompt"/>
+          <p:cNvSpPr>
+            <a:spLocks xmlns:a="http://schemas.openxmlformats.org/drawingml/2006/main" noGrp="1"/>
+          </p:cNvSpPr>
+          <p:nvPr/>
+        </p:nvSpPr>
+        <p:spPr>
+          <a:xfrm xmlns:a="http://schemas.openxmlformats.org/drawingml/2006/main">
+            <a:off x="609904" y="5669280"/>
+            <a:ext cx="10972800" cy="411480"/>
+          </a:xfrm>
+          <a:prstGeom xmlns:a="http://schemas.openxmlformats.org/drawingml/2006/main" prst="rect">
+            <a:avLst/>
+          </a:prstGeom>
+          <a:solidFill xmlns:a="http://schemas.openxmlformats.org/drawingml/2006/main">
+            <a:srgbClr val="E7EFE9"/>
+          </a:solidFill>
+          <a:ln xmlns:a="http://schemas.openxmlformats.org/drawingml/2006/main" w="0">
+            <a:noFill/>
+            <a:prstDash val="solid"/>
+          </a:ln>
+        </p:spPr>
+        <p:txBody>
+          <a:bodyPr xmlns:a="http://schemas.openxmlformats.org/drawingml/2006/main" lIns="228600" tIns="114300" rIns="228600" bIns="114300" anchor="ctr">
+            <a:noAutofit/>
+          </a:bodyPr>
+          <a:lstStyle xmlns:a="http://schemas.openxmlformats.org/drawingml/2006/main"/>
+          <a:p xmlns:a="http://schemas.openxmlformats.org/drawingml/2006/main">
+            <a:pPr algn="l">
+              <a:buNone/>
+              <a:defRPr sz="1150" b="1">
+                <a:solidFill>
+                  <a:srgbClr val="28685E"/>
+                </a:solidFill>
+                <a:latin typeface="Calibri"/>
+                <a:ea typeface="Calibri"/>
+                <a:cs typeface="Calibri"/>
+              </a:defRPr>
+            </a:pPr>
+            <a:r>
+              <a:rPr sz="1150" b="1">
+                <a:solidFill>
+                  <a:srgbClr val="28685E"/>
+                </a:solidFill>
+                <a:latin typeface="Calibri"/>
+                <a:ea typeface="Calibri"/>
+                <a:cs typeface="Calibri"/>
+              </a:rPr>
+              <a:t>Need a different way to take part? (optional) While reviewing your evidence, point, say, sign or show the adult an idea, question or change that would help. You may pass or speak privately. The adult listens, explains what can change and checks whether it helped.</a:t>
             </a:r>
           </a:p>
         </p:txBody>
@@ -6051,6 +6129,10 @@
             <a:prstDash val="solid"/>
           </a:ln>
         </p:spPr>
+        <p:txBody xmlns:a="http://schemas.openxmlformats.org/drawingml/2006/main">
+          <a:bodyPr/>
+          <a:p/>
+        </p:txBody>
       </p:sp>
       <p:sp>
         <p:nvSpPr>
@@ -6200,6 +6282,10 @@
             <a:prstDash val="solid"/>
           </a:ln>
         </p:spPr>
+        <p:txBody xmlns:a="http://schemas.openxmlformats.org/drawingml/2006/main">
+          <a:bodyPr/>
+          <a:p/>
+        </p:txBody>
       </p:sp>
       <p:sp>
         <p:nvSpPr>
@@ -6582,6 +6668,10 @@
             </a:solidFill>
           </a:ln>
         </p:spPr>
+        <p:txBody xmlns:a="http://schemas.openxmlformats.org/drawingml/2006/main">
+          <a:bodyPr/>
+          <a:p/>
+        </p:txBody>
       </p:sp>
       <p:sp>
         <p:nvSpPr>
@@ -6669,6 +6759,10 @@
             </a:solidFill>
           </a:ln>
         </p:spPr>
+        <p:txBody xmlns:a="http://schemas.openxmlformats.org/drawingml/2006/main">
+          <a:bodyPr/>
+          <a:p/>
+        </p:txBody>
       </p:sp>
       <p:sp>
         <p:nvSpPr>
@@ -6786,6 +6880,10 @@
             <a:prstDash val="solid"/>
           </a:ln>
         </p:spPr>
+        <p:txBody xmlns:a="http://schemas.openxmlformats.org/drawingml/2006/main">
+          <a:bodyPr/>
+          <a:p/>
+        </p:txBody>
       </p:sp>
       <p:sp>
         <p:nvSpPr>
@@ -6935,6 +7033,10 @@
             <a:prstDash val="solid"/>
           </a:ln>
         </p:spPr>
+        <p:txBody xmlns:a="http://schemas.openxmlformats.org/drawingml/2006/main">
+          <a:bodyPr/>
+          <a:p/>
+        </p:txBody>
       </p:sp>
       <p:sp>
         <p:nvSpPr>
@@ -7257,6 +7359,10 @@
             <a:prstDash val="solid"/>
           </a:ln>
         </p:spPr>
+        <p:txBody xmlns:a="http://schemas.openxmlformats.org/drawingml/2006/main">
+          <a:bodyPr/>
+          <a:p/>
+        </p:txBody>
       </p:sp>
       <p:sp>
         <p:nvSpPr>
@@ -7406,6 +7512,10 @@
             <a:prstDash val="solid"/>
           </a:ln>
         </p:spPr>
+        <p:txBody xmlns:a="http://schemas.openxmlformats.org/drawingml/2006/main">
+          <a:bodyPr/>
+          <a:p/>
+        </p:txBody>
       </p:sp>
       <p:sp>
         <p:nvSpPr>
@@ -7579,7 +7689,7 @@
                 <a:ea typeface="Calibri"/>
                 <a:cs typeface="Calibri"/>
               </a:rPr>
-              <a:t>Find Monday’s prediction. Do not erase it.</a:t>
+              <a:t>Find your Lesson A prediction. Do not erase it.</a:t>
             </a:r>
           </a:p>
         </p:txBody>
@@ -7788,6 +7898,10 @@
             </a:solidFill>
           </a:ln>
         </p:spPr>
+        <p:txBody xmlns:a="http://schemas.openxmlformats.org/drawingml/2006/main">
+          <a:bodyPr/>
+          <a:p/>
+        </p:txBody>
       </p:sp>
       <p:sp>
         <p:nvSpPr>
@@ -7875,6 +7989,10 @@
             </a:solidFill>
           </a:ln>
         </p:spPr>
+        <p:txBody xmlns:a="http://schemas.openxmlformats.org/drawingml/2006/main">
+          <a:bodyPr/>
+          <a:p/>
+        </p:txBody>
       </p:sp>
       <p:sp>
         <p:nvSpPr>
@@ -7992,6 +8110,10 @@
             <a:prstDash val="solid"/>
           </a:ln>
         </p:spPr>
+        <p:txBody xmlns:a="http://schemas.openxmlformats.org/drawingml/2006/main">
+          <a:bodyPr/>
+          <a:p/>
+        </p:txBody>
       </p:sp>
       <p:sp>
         <p:nvSpPr>
@@ -8141,6 +8263,10 @@
             <a:prstDash val="solid"/>
           </a:ln>
         </p:spPr>
+        <p:txBody xmlns:a="http://schemas.openxmlformats.org/drawingml/2006/main">
+          <a:bodyPr/>
+          <a:p/>
+        </p:txBody>
       </p:sp>
       <p:sp>
         <p:nvSpPr>
@@ -8582,6 +8708,10 @@
             </a:solidFill>
           </a:ln>
         </p:spPr>
+        <p:txBody xmlns:a="http://schemas.openxmlformats.org/drawingml/2006/main">
+          <a:bodyPr/>
+          <a:p/>
+        </p:txBody>
       </p:sp>
       <p:sp>
         <p:nvSpPr>
@@ -8669,6 +8799,10 @@
             </a:solidFill>
           </a:ln>
         </p:spPr>
+        <p:txBody xmlns:a="http://schemas.openxmlformats.org/drawingml/2006/main">
+          <a:bodyPr/>
+          <a:p/>
+        </p:txBody>
       </p:sp>
       <p:sp>
         <p:nvSpPr>
@@ -8756,6 +8890,10 @@
             </a:solidFill>
           </a:ln>
         </p:spPr>
+        <p:txBody xmlns:a="http://schemas.openxmlformats.org/drawingml/2006/main">
+          <a:bodyPr/>
+          <a:p/>
+        </p:txBody>
       </p:sp>
       <p:sp>
         <p:nvSpPr>
@@ -8873,6 +9011,10 @@
             <a:prstDash val="solid"/>
           </a:ln>
         </p:spPr>
+        <p:txBody xmlns:a="http://schemas.openxmlformats.org/drawingml/2006/main">
+          <a:bodyPr/>
+          <a:p/>
+        </p:txBody>
       </p:sp>
       <p:sp>
         <p:nvSpPr>
@@ -9022,6 +9164,10 @@
             <a:prstDash val="solid"/>
           </a:ln>
         </p:spPr>
+        <p:txBody xmlns:a="http://schemas.openxmlformats.org/drawingml/2006/main">
+          <a:bodyPr/>
+          <a:p/>
+        </p:txBody>
       </p:sp>
       <p:sp>
         <p:nvSpPr>
@@ -9171,6 +9317,10 @@
             <a:prstDash val="solid"/>
           </a:ln>
         </p:spPr>
+        <p:txBody xmlns:a="http://schemas.openxmlformats.org/drawingml/2006/main">
+          <a:bodyPr/>
+          <a:p/>
+        </p:txBody>
       </p:sp>
       <p:sp>
         <p:nvSpPr>
@@ -9202,6 +9352,10 @@
             <a:prstDash val="solid"/>
           </a:ln>
         </p:spPr>
+        <p:txBody xmlns:a="http://schemas.openxmlformats.org/drawingml/2006/main">
+          <a:bodyPr/>
+          <a:p/>
+        </p:txBody>
       </p:sp>
       <p:sp>
         <p:nvSpPr>
@@ -9235,6 +9389,10 @@
             <a:prstDash val="solid"/>
           </a:ln>
         </p:spPr>
+        <p:txBody xmlns:a="http://schemas.openxmlformats.org/drawingml/2006/main">
+          <a:bodyPr/>
+          <a:p/>
+        </p:txBody>
       </p:sp>
       <p:sp>
         <p:nvSpPr>
@@ -9266,6 +9424,10 @@
             <a:prstDash val="solid"/>
           </a:ln>
         </p:spPr>
+        <p:txBody xmlns:a="http://schemas.openxmlformats.org/drawingml/2006/main">
+          <a:bodyPr/>
+          <a:p/>
+        </p:txBody>
       </p:sp>
       <p:sp>
         <p:nvSpPr>
@@ -9597,6 +9759,10 @@
             <a:prstDash val="solid"/>
           </a:ln>
         </p:spPr>
+        <p:txBody xmlns:a="http://schemas.openxmlformats.org/drawingml/2006/main">
+          <a:bodyPr/>
+          <a:p/>
+        </p:txBody>
       </p:sp>
       <p:sp>
         <p:nvSpPr>
@@ -9746,6 +9912,10 @@
             <a:prstDash val="solid"/>
           </a:ln>
         </p:spPr>
+        <p:txBody xmlns:a="http://schemas.openxmlformats.org/drawingml/2006/main">
+          <a:bodyPr/>
+          <a:p/>
+        </p:txBody>
       </p:sp>
       <p:sp>
         <p:nvSpPr>
@@ -10246,6 +10416,10 @@
             </a:solidFill>
           </a:ln>
         </p:spPr>
+        <p:txBody xmlns:a="http://schemas.openxmlformats.org/drawingml/2006/main">
+          <a:bodyPr/>
+          <a:p/>
+        </p:txBody>
       </p:sp>
       <p:sp>
         <p:nvSpPr>
@@ -10333,6 +10507,10 @@
             </a:solidFill>
           </a:ln>
         </p:spPr>
+        <p:txBody xmlns:a="http://schemas.openxmlformats.org/drawingml/2006/main">
+          <a:bodyPr/>
+          <a:p/>
+        </p:txBody>
       </p:sp>
       <p:sp>
         <p:nvSpPr>
@@ -10420,6 +10598,10 @@
             </a:solidFill>
           </a:ln>
         </p:spPr>
+        <p:txBody xmlns:a="http://schemas.openxmlformats.org/drawingml/2006/main">
+          <a:bodyPr/>
+          <a:p/>
+        </p:txBody>
       </p:sp>
       <p:sp>
         <p:nvSpPr>
@@ -10507,6 +10689,10 @@
             </a:solidFill>
           </a:ln>
         </p:spPr>
+        <p:txBody xmlns:a="http://schemas.openxmlformats.org/drawingml/2006/main">
+          <a:bodyPr/>
+          <a:p/>
+        </p:txBody>
       </p:sp>
       <p:sp>
         <p:nvSpPr>
@@ -10624,6 +10810,10 @@
             <a:prstDash val="solid"/>
           </a:ln>
         </p:spPr>
+        <p:txBody xmlns:a="http://schemas.openxmlformats.org/drawingml/2006/main">
+          <a:bodyPr/>
+          <a:p/>
+        </p:txBody>
       </p:sp>
       <p:sp>
         <p:nvSpPr>
@@ -10773,6 +10963,10 @@
             <a:prstDash val="solid"/>
           </a:ln>
         </p:spPr>
+        <p:txBody xmlns:a="http://schemas.openxmlformats.org/drawingml/2006/main">
+          <a:bodyPr/>
+          <a:p/>
+        </p:txBody>
       </p:sp>
       <p:sp>
         <p:nvSpPr>
@@ -11214,6 +11408,10 @@
             </a:solidFill>
           </a:ln>
         </p:spPr>
+        <p:txBody xmlns:a="http://schemas.openxmlformats.org/drawingml/2006/main">
+          <a:bodyPr/>
+          <a:p/>
+        </p:txBody>
       </p:sp>
       <p:sp>
         <p:nvSpPr>
@@ -11301,6 +11499,10 @@
             </a:solidFill>
           </a:ln>
         </p:spPr>
+        <p:txBody xmlns:a="http://schemas.openxmlformats.org/drawingml/2006/main">
+          <a:bodyPr/>
+          <a:p/>
+        </p:txBody>
       </p:sp>
       <p:sp>
         <p:nvSpPr>
@@ -11388,6 +11590,10 @@
             </a:solidFill>
           </a:ln>
         </p:spPr>
+        <p:txBody xmlns:a="http://schemas.openxmlformats.org/drawingml/2006/main">
+          <a:bodyPr/>
+          <a:p/>
+        </p:txBody>
       </p:sp>
       <p:sp>
         <p:nvSpPr>
@@ -11505,6 +11711,10 @@
             <a:prstDash val="solid"/>
           </a:ln>
         </p:spPr>
+        <p:txBody xmlns:a="http://schemas.openxmlformats.org/drawingml/2006/main">
+          <a:bodyPr/>
+          <a:p/>
+        </p:txBody>
       </p:sp>
       <p:sp>
         <p:nvSpPr>
@@ -11654,6 +11864,10 @@
             <a:prstDash val="solid"/>
           </a:ln>
         </p:spPr>
+        <p:txBody xmlns:a="http://schemas.openxmlformats.org/drawingml/2006/main">
+          <a:bodyPr/>
+          <a:p/>
+        </p:txBody>
       </p:sp>
       <p:sp>
         <p:nvSpPr>
@@ -12095,6 +12309,10 @@
             </a:solidFill>
           </a:ln>
         </p:spPr>
+        <p:txBody xmlns:a="http://schemas.openxmlformats.org/drawingml/2006/main">
+          <a:bodyPr/>
+          <a:p/>
+        </p:txBody>
       </p:sp>
       <p:sp>
         <p:nvSpPr>
@@ -12182,6 +12400,10 @@
             </a:solidFill>
           </a:ln>
         </p:spPr>
+        <p:txBody xmlns:a="http://schemas.openxmlformats.org/drawingml/2006/main">
+          <a:bodyPr/>
+          <a:p/>
+        </p:txBody>
       </p:sp>
       <p:sp>
         <p:nvSpPr>
@@ -12269,6 +12491,10 @@
             </a:solidFill>
           </a:ln>
         </p:spPr>
+        <p:txBody xmlns:a="http://schemas.openxmlformats.org/drawingml/2006/main">
+          <a:bodyPr/>
+          <a:p/>
+        </p:txBody>
       </p:sp>
       <p:sp>
         <p:nvSpPr>
@@ -12386,6 +12612,10 @@
             <a:prstDash val="solid"/>
           </a:ln>
         </p:spPr>
+        <p:txBody xmlns:a="http://schemas.openxmlformats.org/drawingml/2006/main">
+          <a:bodyPr/>
+          <a:p/>
+        </p:txBody>
       </p:sp>
       <p:sp>
         <p:nvSpPr>
@@ -12535,6 +12765,10 @@
             <a:prstDash val="solid"/>
           </a:ln>
         </p:spPr>
+        <p:txBody xmlns:a="http://schemas.openxmlformats.org/drawingml/2006/main">
+          <a:bodyPr/>
+          <a:p/>
+        </p:txBody>
       </p:sp>
       <p:sp>
         <p:nvSpPr>
@@ -13053,6 +13287,10 @@
             <a:prstDash val="solid"/>
           </a:ln>
         </p:spPr>
+        <p:txBody xmlns:a="http://schemas.openxmlformats.org/drawingml/2006/main">
+          <a:bodyPr/>
+          <a:p/>
+        </p:txBody>
       </p:sp>
       <p:sp>
         <p:nvSpPr>
@@ -13202,6 +13440,10 @@
             <a:prstDash val="solid"/>
           </a:ln>
         </p:spPr>
+        <p:txBody xmlns:a="http://schemas.openxmlformats.org/drawingml/2006/main">
+          <a:bodyPr/>
+          <a:p/>
+        </p:txBody>
       </p:sp>
       <p:sp>
         <p:nvSpPr>
@@ -13584,6 +13826,10 @@
             </a:solidFill>
           </a:ln>
         </p:spPr>
+        <p:txBody xmlns:a="http://schemas.openxmlformats.org/drawingml/2006/main">
+          <a:bodyPr/>
+          <a:p/>
+        </p:txBody>
       </p:sp>
       <p:sp>
         <p:nvSpPr>
@@ -13671,6 +13917,10 @@
             </a:solidFill>
           </a:ln>
         </p:spPr>
+        <p:txBody xmlns:a="http://schemas.openxmlformats.org/drawingml/2006/main">
+          <a:bodyPr/>
+          <a:p/>
+        </p:txBody>
       </p:sp>
       <p:sp>
         <p:nvSpPr>
